--- a/examples/text-autofit.pptx
+++ b/examples/text-autofit.pptx
@@ -9,6 +9,7 @@
     <p:sldId id="257" r:id="rId8"/>
     <p:sldId id="258" r:id="rId9"/>
     <p:sldId id="259" r:id="rId10"/>
+    <p:sldId id="260" r:id="rId11"/>
   </p:sldIdLst>
   <p:sldSz cx="5486400" cy="3200400" type="screen4x3"/>
   <p:notesSz cx="6858000" cy="9144000"/>
@@ -3636,6 +3637,276 @@
                 <a:latin typeface="Arial"/>
               </a:rPr>
               <a:t>Expand 3</a:t>
+            </a:r>
+          </a:p>
+        </p:txBody>
+      </p:sp>
+    </p:spTree>
+  </p:cSld>
+  <p:clrMapOvr>
+    <a:masterClrMapping/>
+  </p:clrMapOvr>
+</p:sld>
+</file>
+
+<file path=ppt/slides/slide5.xml><?xml version="1.0" encoding="utf-8"?>
+<p:sld xmlns:a="http://schemas.openxmlformats.org/drawingml/2006/main" xmlns:p="http://schemas.openxmlformats.org/presentationml/2006/main" xmlns:r="http://schemas.openxmlformats.org/officeDocument/2006/relationships">
+  <p:cSld>
+    <p:spTree>
+      <p:nvGrpSpPr>
+        <p:cNvPr id="1" name=""/>
+        <p:cNvGrpSpPr/>
+        <p:nvPr/>
+      </p:nvGrpSpPr>
+      <p:grpSpPr/>
+      <p:sp>
+        <p:nvSpPr>
+          <p:cNvPr id="2" name="Rectangle 1"/>
+          <p:cNvSpPr/>
+          <p:nvPr/>
+        </p:nvSpPr>
+        <p:spPr>
+          <a:xfrm>
+            <a:off x="777240" y="548640"/>
+            <a:ext cx="548640" cy="457200"/>
+          </a:xfrm>
+          <a:prstGeom prst="rect">
+            <a:avLst/>
+          </a:prstGeom>
+          <a:solidFill>
+            <a:srgbClr val="E6F0FF"/>
+          </a:solidFill>
+          <a:ln w="12700">
+            <a:solidFill>
+              <a:srgbClr val="2850A0"/>
+            </a:solidFill>
+          </a:ln>
+        </p:spPr>
+        <p:txBody>
+          <a:bodyPr rtlCol="0" anchor="ctr" wrap="none" tIns="50800" bIns="50800" lIns="76200" rIns="76200">
+            <a:spAutoFit/>
+          </a:bodyPr>
+          <a:lstStyle/>
+          <a:p>
+            <a:pPr algn="l"/>
+            <a:r>
+              <a:rPr sz="1800">
+                <a:solidFill>
+                  <a:srgbClr val="000000"/>
+                </a:solidFill>
+                <a:latin typeface="Arial"/>
+              </a:rPr>
+              <a:t>Label L</a:t>
+            </a:r>
+          </a:p>
+        </p:txBody>
+      </p:sp>
+      <p:sp>
+        <p:nvSpPr>
+          <p:cNvPr id="3" name="Rectangle 2"/>
+          <p:cNvSpPr/>
+          <p:nvPr/>
+        </p:nvSpPr>
+        <p:spPr>
+          <a:xfrm>
+            <a:off x="2514600" y="548640"/>
+            <a:ext cx="548640" cy="457200"/>
+          </a:xfrm>
+          <a:prstGeom prst="rect">
+            <a:avLst/>
+          </a:prstGeom>
+          <a:solidFill>
+            <a:srgbClr val="E6F0FF"/>
+          </a:solidFill>
+          <a:ln w="12700">
+            <a:solidFill>
+              <a:srgbClr val="2850A0"/>
+            </a:solidFill>
+          </a:ln>
+        </p:spPr>
+        <p:txBody>
+          <a:bodyPr rtlCol="0" anchor="ctr" wrap="none" tIns="50800" bIns="50800" lIns="76200" rIns="76200">
+            <a:spAutoFit/>
+          </a:bodyPr>
+          <a:lstStyle/>
+          <a:p>
+            <a:pPr algn="ctr"/>
+            <a:r>
+              <a:rPr sz="1800">
+                <a:solidFill>
+                  <a:srgbClr val="000000"/>
+                </a:solidFill>
+                <a:latin typeface="Arial"/>
+              </a:rPr>
+              <a:t>Label C</a:t>
+            </a:r>
+          </a:p>
+        </p:txBody>
+      </p:sp>
+      <p:sp>
+        <p:nvSpPr>
+          <p:cNvPr id="4" name="Rectangle 3"/>
+          <p:cNvSpPr/>
+          <p:nvPr/>
+        </p:nvSpPr>
+        <p:spPr>
+          <a:xfrm>
+            <a:off x="4251959" y="548640"/>
+            <a:ext cx="548640" cy="457200"/>
+          </a:xfrm>
+          <a:prstGeom prst="rect">
+            <a:avLst/>
+          </a:prstGeom>
+          <a:solidFill>
+            <a:srgbClr val="E6F0FF"/>
+          </a:solidFill>
+          <a:ln w="12700">
+            <a:solidFill>
+              <a:srgbClr val="2850A0"/>
+            </a:solidFill>
+          </a:ln>
+        </p:spPr>
+        <p:txBody>
+          <a:bodyPr rtlCol="0" anchor="ctr" wrap="none" tIns="50800" bIns="50800" lIns="76200" rIns="76200">
+            <a:spAutoFit/>
+          </a:bodyPr>
+          <a:lstStyle/>
+          <a:p>
+            <a:pPr algn="r"/>
+            <a:r>
+              <a:rPr sz="1800">
+                <a:solidFill>
+                  <a:srgbClr val="000000"/>
+                </a:solidFill>
+                <a:latin typeface="Arial"/>
+              </a:rPr>
+              <a:t>Label R</a:t>
+            </a:r>
+          </a:p>
+        </p:txBody>
+      </p:sp>
+      <p:sp>
+        <p:nvSpPr>
+          <p:cNvPr id="5" name="Rectangle 4"/>
+          <p:cNvSpPr/>
+          <p:nvPr/>
+        </p:nvSpPr>
+        <p:spPr>
+          <a:xfrm>
+            <a:off x="274320" y="1828800"/>
+            <a:ext cx="1554480" cy="457200"/>
+          </a:xfrm>
+          <a:prstGeom prst="rect">
+            <a:avLst/>
+          </a:prstGeom>
+          <a:solidFill>
+            <a:srgbClr val="E6F0FF"/>
+          </a:solidFill>
+          <a:ln w="12700">
+            <a:solidFill>
+              <a:srgbClr val="2850A0"/>
+            </a:solidFill>
+          </a:ln>
+        </p:spPr>
+        <p:txBody>
+          <a:bodyPr rtlCol="0" anchor="ctr" wrap="none" tIns="50800" bIns="50800" lIns="76200" rIns="76200">
+            <a:spAutoFit/>
+          </a:bodyPr>
+          <a:lstStyle/>
+          <a:p>
+            <a:pPr algn="l"/>
+            <a:r>
+              <a:rPr sz="1800">
+                <a:solidFill>
+                  <a:srgbClr val="000000"/>
+                </a:solidFill>
+                <a:latin typeface="Arial"/>
+              </a:rPr>
+              <a:t>Label L</a:t>
+            </a:r>
+          </a:p>
+        </p:txBody>
+      </p:sp>
+      <p:sp>
+        <p:nvSpPr>
+          <p:cNvPr id="6" name="Rectangle 5"/>
+          <p:cNvSpPr/>
+          <p:nvPr/>
+        </p:nvSpPr>
+        <p:spPr>
+          <a:xfrm>
+            <a:off x="2011679" y="1828800"/>
+            <a:ext cx="1554480" cy="457200"/>
+          </a:xfrm>
+          <a:prstGeom prst="rect">
+            <a:avLst/>
+          </a:prstGeom>
+          <a:solidFill>
+            <a:srgbClr val="E6F0FF"/>
+          </a:solidFill>
+          <a:ln w="12700">
+            <a:solidFill>
+              <a:srgbClr val="2850A0"/>
+            </a:solidFill>
+          </a:ln>
+        </p:spPr>
+        <p:txBody>
+          <a:bodyPr rtlCol="0" anchor="ctr" wrap="none" tIns="50800" bIns="50800" lIns="76200" rIns="76200">
+            <a:spAutoFit/>
+          </a:bodyPr>
+          <a:lstStyle/>
+          <a:p>
+            <a:pPr algn="ctr"/>
+            <a:r>
+              <a:rPr sz="1800">
+                <a:solidFill>
+                  <a:srgbClr val="000000"/>
+                </a:solidFill>
+                <a:latin typeface="Arial"/>
+              </a:rPr>
+              <a:t>Label C</a:t>
+            </a:r>
+          </a:p>
+        </p:txBody>
+      </p:sp>
+      <p:sp>
+        <p:nvSpPr>
+          <p:cNvPr id="7" name="Rectangle 6"/>
+          <p:cNvSpPr/>
+          <p:nvPr/>
+        </p:nvSpPr>
+        <p:spPr>
+          <a:xfrm>
+            <a:off x="3749039" y="1828800"/>
+            <a:ext cx="1554480" cy="457200"/>
+          </a:xfrm>
+          <a:prstGeom prst="rect">
+            <a:avLst/>
+          </a:prstGeom>
+          <a:solidFill>
+            <a:srgbClr val="E6F0FF"/>
+          </a:solidFill>
+          <a:ln w="12700">
+            <a:solidFill>
+              <a:srgbClr val="2850A0"/>
+            </a:solidFill>
+          </a:ln>
+        </p:spPr>
+        <p:txBody>
+          <a:bodyPr rtlCol="0" anchor="ctr" wrap="none" tIns="50800" bIns="50800" lIns="76200" rIns="76200">
+            <a:spAutoFit/>
+          </a:bodyPr>
+          <a:lstStyle/>
+          <a:p>
+            <a:pPr algn="r"/>
+            <a:r>
+              <a:rPr sz="1800">
+                <a:solidFill>
+                  <a:srgbClr val="000000"/>
+                </a:solidFill>
+                <a:latin typeface="Arial"/>
+              </a:rPr>
+              <a:t>Label R</a:t>
             </a:r>
           </a:p>
         </p:txBody>
